--- a/data-eng/decks/w2d5s4.pptx
+++ b/data-eng/decks/w2d5s4.pptx
@@ -3099,7 +3099,7 @@
       <p:grpSpPr/>
       <p:sp>
         <p:nvSpPr>
-          <p:cNvPr id="2" name="Oval 1"/>
+          <p:cNvPr id="2" name="deckgen:decor"/>
           <p:cNvSpPr/>
           <p:nvPr/>
         </p:nvSpPr>
@@ -3129,7 +3129,7 @@
       </p:sp>
       <p:sp>
         <p:nvSpPr>
-          <p:cNvPr id="3" name="Oval 2"/>
+          <p:cNvPr id="3" name="deckgen:decor"/>
           <p:cNvSpPr/>
           <p:nvPr/>
         </p:nvSpPr>
@@ -3159,7 +3159,7 @@
       </p:sp>
       <p:sp>
         <p:nvSpPr>
-          <p:cNvPr id="4" name="Oval 3"/>
+          <p:cNvPr id="4" name="deckgen:decor"/>
           <p:cNvSpPr/>
           <p:nvPr/>
         </p:nvSpPr>
@@ -3189,7 +3189,7 @@
       </p:sp>
       <p:sp>
         <p:nvSpPr>
-          <p:cNvPr id="5" name="Rectangle 4"/>
+          <p:cNvPr id="5" name="deckgen:decor"/>
           <p:cNvSpPr/>
           <p:nvPr/>
         </p:nvSpPr>
@@ -3219,7 +3219,7 @@
       </p:sp>
       <p:sp>
         <p:nvSpPr>
-          <p:cNvPr id="6" name="Oval 5"/>
+          <p:cNvPr id="6" name="deckgen:decor"/>
           <p:cNvSpPr/>
           <p:nvPr/>
         </p:nvSpPr>
@@ -3249,7 +3249,7 @@
       </p:sp>
       <p:sp>
         <p:nvSpPr>
-          <p:cNvPr id="7" name="Oval 6"/>
+          <p:cNvPr id="7" name="deckgen:decor"/>
           <p:cNvSpPr/>
           <p:nvPr/>
         </p:nvSpPr>
@@ -3279,7 +3279,7 @@
       </p:sp>
       <p:sp>
         <p:nvSpPr>
-          <p:cNvPr id="8" name="Oval 7"/>
+          <p:cNvPr id="8" name="deckgen:decor"/>
           <p:cNvSpPr/>
           <p:nvPr/>
         </p:nvSpPr>
@@ -3309,7 +3309,7 @@
       </p:sp>
       <p:sp>
         <p:nvSpPr>
-          <p:cNvPr id="9" name="Oval 8"/>
+          <p:cNvPr id="9" name="deckgen:decor"/>
           <p:cNvSpPr/>
           <p:nvPr/>
         </p:nvSpPr>
@@ -3339,7 +3339,7 @@
       </p:sp>
       <p:sp>
         <p:nvSpPr>
-          <p:cNvPr id="10" name="Rectangle 9"/>
+          <p:cNvPr id="10" name="deckgen:decor"/>
           <p:cNvSpPr/>
           <p:nvPr/>
         </p:nvSpPr>
@@ -3599,7 +3599,7 @@
       <p:grpSpPr/>
       <p:sp>
         <p:nvSpPr>
-          <p:cNvPr id="2" name="Oval 1"/>
+          <p:cNvPr id="2" name="deckgen:decor"/>
           <p:cNvSpPr/>
           <p:nvPr/>
         </p:nvSpPr>
@@ -3629,7 +3629,7 @@
       </p:sp>
       <p:sp>
         <p:nvSpPr>
-          <p:cNvPr id="3" name="Oval 2"/>
+          <p:cNvPr id="3" name="deckgen:decor"/>
           <p:cNvSpPr/>
           <p:nvPr/>
         </p:nvSpPr>
@@ -4406,7 +4406,7 @@
       <p:grpSpPr/>
       <p:sp>
         <p:nvSpPr>
-          <p:cNvPr id="2" name="Oval 1"/>
+          <p:cNvPr id="2" name="deckgen:decor"/>
           <p:cNvSpPr/>
           <p:nvPr/>
         </p:nvSpPr>
@@ -4436,7 +4436,7 @@
       </p:sp>
       <p:sp>
         <p:nvSpPr>
-          <p:cNvPr id="3" name="Oval 2"/>
+          <p:cNvPr id="3" name="deckgen:decor"/>
           <p:cNvSpPr/>
           <p:nvPr/>
         </p:nvSpPr>
@@ -4466,7 +4466,7 @@
       </p:sp>
       <p:sp>
         <p:nvSpPr>
-          <p:cNvPr id="4" name="Oval 3"/>
+          <p:cNvPr id="4" name="deckgen:decor"/>
           <p:cNvSpPr/>
           <p:nvPr/>
         </p:nvSpPr>
@@ -5260,7 +5260,7 @@
                 <a:ea typeface="Pretendard"/>
                 <a:cs typeface="Pretendard"/>
               </a:rPr>
-              <a:t>제출은 사이트의 「산출물 제출」 페이지에서 — 그 뒤 주차별 산출물 갤러리에도 공유해 주세요</a:t>
+              <a:t>제출은 사이트 「산출물 제출」에서 — 마감 10-08(목) 23:59, 그 뒤 주차별 산출물 갤러리에도 공유</a:t>
             </a:r>
           </a:p>
         </p:txBody>
@@ -5397,7 +5397,7 @@
       <p:grpSpPr/>
       <p:sp>
         <p:nvSpPr>
-          <p:cNvPr id="2" name="Oval 1"/>
+          <p:cNvPr id="2" name="deckgen:decor"/>
           <p:cNvSpPr/>
           <p:nvPr/>
         </p:nvSpPr>
@@ -5427,7 +5427,7 @@
       </p:sp>
       <p:sp>
         <p:nvSpPr>
-          <p:cNvPr id="3" name="Oval 2"/>
+          <p:cNvPr id="3" name="deckgen:decor"/>
           <p:cNvSpPr/>
           <p:nvPr/>
         </p:nvSpPr>
@@ -5457,7 +5457,7 @@
       </p:sp>
       <p:sp>
         <p:nvSpPr>
-          <p:cNvPr id="4" name="Oval 3"/>
+          <p:cNvPr id="4" name="deckgen:decor"/>
           <p:cNvSpPr/>
           <p:nvPr/>
         </p:nvSpPr>
@@ -5663,7 +5663,7 @@
       </p:sp>
       <p:sp>
         <p:nvSpPr>
-          <p:cNvPr id="10" name="TextBox 9"/>
+          <p:cNvPr id="10" name="deckgen:ornament"/>
           <p:cNvSpPr txBox="1"/>
           <p:nvPr/>
         </p:nvSpPr>
@@ -5848,7 +5848,7 @@
       </p:sp>
       <p:sp>
         <p:nvSpPr>
-          <p:cNvPr id="14" name="TextBox 13"/>
+          <p:cNvPr id="14" name="deckgen:ornament"/>
           <p:cNvSpPr txBox="1"/>
           <p:nvPr/>
         </p:nvSpPr>
@@ -6170,7 +6170,7 @@
       <p:grpSpPr/>
       <p:sp>
         <p:nvSpPr>
-          <p:cNvPr id="2" name="Oval 1"/>
+          <p:cNvPr id="2" name="deckgen:decor"/>
           <p:cNvSpPr/>
           <p:nvPr/>
         </p:nvSpPr>
@@ -6200,7 +6200,7 @@
       </p:sp>
       <p:sp>
         <p:nvSpPr>
-          <p:cNvPr id="3" name="Oval 2"/>
+          <p:cNvPr id="3" name="deckgen:decor"/>
           <p:cNvSpPr/>
           <p:nvPr/>
         </p:nvSpPr>
@@ -6230,7 +6230,7 @@
       </p:sp>
       <p:sp>
         <p:nvSpPr>
-          <p:cNvPr id="4" name="Oval 3"/>
+          <p:cNvPr id="4" name="deckgen:decor"/>
           <p:cNvSpPr/>
           <p:nvPr/>
         </p:nvSpPr>
@@ -7435,7 +7435,7 @@
       <p:grpSpPr/>
       <p:sp>
         <p:nvSpPr>
-          <p:cNvPr id="2" name="Oval 1"/>
+          <p:cNvPr id="2" name="deckgen:decor"/>
           <p:cNvSpPr/>
           <p:nvPr/>
         </p:nvSpPr>
@@ -7465,7 +7465,7 @@
       </p:sp>
       <p:sp>
         <p:nvSpPr>
-          <p:cNvPr id="3" name="Oval 2"/>
+          <p:cNvPr id="3" name="deckgen:decor"/>
           <p:cNvSpPr/>
           <p:nvPr/>
         </p:nvSpPr>
@@ -7495,7 +7495,7 @@
       </p:sp>
       <p:sp>
         <p:nvSpPr>
-          <p:cNvPr id="4" name="Oval 3"/>
+          <p:cNvPr id="4" name="deckgen:decor"/>
           <p:cNvSpPr/>
           <p:nvPr/>
         </p:nvSpPr>
@@ -9146,7 +9146,7 @@
       <p:grpSpPr/>
       <p:sp>
         <p:nvSpPr>
-          <p:cNvPr id="2" name="Oval 1"/>
+          <p:cNvPr id="2" name="deckgen:decor"/>
           <p:cNvSpPr/>
           <p:nvPr/>
         </p:nvSpPr>
@@ -9176,7 +9176,7 @@
       </p:sp>
       <p:sp>
         <p:nvSpPr>
-          <p:cNvPr id="3" name="Oval 2"/>
+          <p:cNvPr id="3" name="deckgen:decor"/>
           <p:cNvSpPr/>
           <p:nvPr/>
         </p:nvSpPr>
@@ -9206,7 +9206,7 @@
       </p:sp>
       <p:sp>
         <p:nvSpPr>
-          <p:cNvPr id="4" name="Oval 3"/>
+          <p:cNvPr id="4" name="deckgen:decor"/>
           <p:cNvSpPr/>
           <p:nvPr/>
         </p:nvSpPr>
@@ -10646,7 +10646,7 @@
       <p:grpSpPr/>
       <p:sp>
         <p:nvSpPr>
-          <p:cNvPr id="2" name="Oval 1"/>
+          <p:cNvPr id="2" name="deckgen:decor"/>
           <p:cNvSpPr/>
           <p:nvPr/>
         </p:nvSpPr>
@@ -10676,7 +10676,7 @@
       </p:sp>
       <p:sp>
         <p:nvSpPr>
-          <p:cNvPr id="3" name="Oval 2"/>
+          <p:cNvPr id="3" name="deckgen:decor"/>
           <p:cNvSpPr/>
           <p:nvPr/>
         </p:nvSpPr>
@@ -10706,7 +10706,7 @@
       </p:sp>
       <p:sp>
         <p:nvSpPr>
-          <p:cNvPr id="4" name="Oval 3"/>
+          <p:cNvPr id="4" name="deckgen:decor"/>
           <p:cNvSpPr/>
           <p:nvPr/>
         </p:nvSpPr>
@@ -12348,7 +12348,7 @@
       <p:grpSpPr/>
       <p:sp>
         <p:nvSpPr>
-          <p:cNvPr id="2" name="Oval 1"/>
+          <p:cNvPr id="2" name="deckgen:decor"/>
           <p:cNvSpPr/>
           <p:nvPr/>
         </p:nvSpPr>
@@ -12378,7 +12378,7 @@
       </p:sp>
       <p:sp>
         <p:nvSpPr>
-          <p:cNvPr id="3" name="Oval 2"/>
+          <p:cNvPr id="3" name="deckgen:decor"/>
           <p:cNvSpPr/>
           <p:nvPr/>
         </p:nvSpPr>
@@ -12408,7 +12408,7 @@
       </p:sp>
       <p:sp>
         <p:nvSpPr>
-          <p:cNvPr id="4" name="Oval 3"/>
+          <p:cNvPr id="4" name="deckgen:decor"/>
           <p:cNvSpPr/>
           <p:nvPr/>
         </p:nvSpPr>
@@ -13468,7 +13468,7 @@
       <p:grpSpPr/>
       <p:sp>
         <p:nvSpPr>
-          <p:cNvPr id="2" name="Oval 1"/>
+          <p:cNvPr id="2" name="deckgen:decor"/>
           <p:cNvSpPr/>
           <p:nvPr/>
         </p:nvSpPr>
@@ -13498,7 +13498,7 @@
       </p:sp>
       <p:sp>
         <p:nvSpPr>
-          <p:cNvPr id="3" name="Oval 2"/>
+          <p:cNvPr id="3" name="deckgen:decor"/>
           <p:cNvSpPr/>
           <p:nvPr/>
         </p:nvSpPr>
@@ -13528,7 +13528,7 @@
       </p:sp>
       <p:sp>
         <p:nvSpPr>
-          <p:cNvPr id="4" name="Oval 3"/>
+          <p:cNvPr id="4" name="deckgen:decor"/>
           <p:cNvSpPr/>
           <p:nvPr/>
         </p:nvSpPr>
@@ -13734,7 +13734,7 @@
       </p:sp>
       <p:sp>
         <p:nvSpPr>
-          <p:cNvPr id="10" name="TextBox 9"/>
+          <p:cNvPr id="10" name="deckgen:ornament"/>
           <p:cNvSpPr txBox="1"/>
           <p:nvPr/>
         </p:nvSpPr>
@@ -13919,7 +13919,7 @@
       </p:sp>
       <p:sp>
         <p:nvSpPr>
-          <p:cNvPr id="14" name="TextBox 13"/>
+          <p:cNvPr id="14" name="deckgen:ornament"/>
           <p:cNvSpPr txBox="1"/>
           <p:nvPr/>
         </p:nvSpPr>
@@ -14104,7 +14104,7 @@
       </p:sp>
       <p:sp>
         <p:nvSpPr>
-          <p:cNvPr id="18" name="TextBox 17"/>
+          <p:cNvPr id="18" name="deckgen:ornament"/>
           <p:cNvSpPr txBox="1"/>
           <p:nvPr/>
         </p:nvSpPr>
@@ -14271,7 +14271,7 @@
       </p:sp>
       <p:sp>
         <p:nvSpPr>
-          <p:cNvPr id="22" name="TextBox 21"/>
+          <p:cNvPr id="22" name="deckgen:ornament"/>
           <p:cNvSpPr txBox="1"/>
           <p:nvPr/>
         </p:nvSpPr>
